--- a/plugins/presentation/skills/pptx-arch-style/scripts/tests/fixtures/violators/red-highlight-marker-border.pptx
+++ b/plugins/presentation/skills/pptx-arch-style/scripts/tests/fixtures/violators/red-highlight-marker-border.pptx
@@ -1270,7 +1270,7 @@
         </p:nvSpPr>
         <p:spPr>
           <a:xfrm>
-            <a:off x="0" y="457200"/>
+            <a:off x="0" y="777240"/>
             <a:ext cx="9144000" cy="38405"/>
           </a:xfrm>
           <a:prstGeom prst="rect">
@@ -1291,7 +1291,7 @@
         <p:spPr>
           <a:xfrm>
             <a:off x="685800" y="0"/>
-            <a:ext cx="8443570" cy="572414"/>
+            <a:ext cx="8443570" cy="777240"/>
           </a:xfrm>
           <a:prstGeom prst="rect">
             <a:avLst/>
@@ -1300,7 +1300,7 @@
           <a:ln/>
         </p:spPr>
         <p:txBody>
-          <a:bodyPr wrap="square" rtlCol="0" anchor="ctr"/>
+          <a:bodyPr wrap="square" rtlCol="0" anchor="t"/>
           <a:lstStyle/>
           <a:p>
             <a:pPr algn="l" indent="0" marL="0">
@@ -1329,7 +1329,7 @@
         </p:nvSpPr>
         <p:spPr>
           <a:xfrm>
-            <a:off x="548640" y="822960"/>
+            <a:off x="548640" y="1005840"/>
             <a:ext cx="8046720" cy="457200"/>
           </a:xfrm>
           <a:prstGeom prst="rect">

--- a/plugins/presentation/skills/pptx-arch-style/scripts/tests/fixtures/violators/red-highlight-marker-border.pptx
+++ b/plugins/presentation/skills/pptx-arch-style/scripts/tests/fixtures/violators/red-highlight-marker-border.pptx
@@ -1270,7 +1270,7 @@
         </p:nvSpPr>
         <p:spPr>
           <a:xfrm>
-            <a:off x="0" y="777240"/>
+            <a:off x="0" y="457200"/>
             <a:ext cx="9144000" cy="38405"/>
           </a:xfrm>
           <a:prstGeom prst="rect">
@@ -1291,7 +1291,7 @@
         <p:spPr>
           <a:xfrm>
             <a:off x="685800" y="0"/>
-            <a:ext cx="8443570" cy="777240"/>
+            <a:ext cx="8443570" cy="572414"/>
           </a:xfrm>
           <a:prstGeom prst="rect">
             <a:avLst/>
@@ -1300,7 +1300,7 @@
           <a:ln/>
         </p:spPr>
         <p:txBody>
-          <a:bodyPr wrap="square" rtlCol="0" anchor="t"/>
+          <a:bodyPr wrap="square" rtlCol="0" anchor="ctr"/>
           <a:lstStyle/>
           <a:p>
             <a:pPr algn="l" indent="0" marL="0">
@@ -1329,7 +1329,7 @@
         </p:nvSpPr>
         <p:spPr>
           <a:xfrm>
-            <a:off x="548640" y="1005840"/>
+            <a:off x="548640" y="719633"/>
             <a:ext cx="8046720" cy="457200"/>
           </a:xfrm>
           <a:prstGeom prst="rect">
